--- a/ppt/Grade10/G10_S43_Refraction_Through_a_Lens_1.pptx
+++ b/ppt/Grade10/G10_S43_Refraction_Through_a_Lens_1.pptx
@@ -4960,9 +4960,33 @@
           </a:p>
         </p:txBody>
       </p:sp>
-      <p:sp>
-        <p:nvSpPr>
-          <p:cNvPr id="8" name="TextBox 7"/>
+      <p:pic>
+        <p:nvPicPr>
+          <p:cNvPr id="8" name="Picture 7" descr="ray_FFFFFF.png"/>
+          <p:cNvPicPr>
+            <a:picLocks noChangeAspect="1"/>
+          </p:cNvPicPr>
+          <p:nvPr/>
+        </p:nvPicPr>
+        <p:blipFill>
+          <a:blip r:embed="rId2"/>
+          <a:stretch>
+            <a:fillRect/>
+          </a:stretch>
+        </p:blipFill>
+        <p:spPr>
+          <a:xfrm>
+            <a:off x="1070762" y="2323490"/>
+            <a:ext cx="281635" cy="281635"/>
+          </a:xfrm>
+          <a:prstGeom prst="rect">
+            <a:avLst/>
+          </a:prstGeom>
+        </p:spPr>
+      </p:pic>
+      <p:sp>
+        <p:nvSpPr>
+          <p:cNvPr id="9" name="TextBox 8"/>
           <p:cNvSpPr txBox="1"/>
           <p:nvPr/>
         </p:nvSpPr>
@@ -4997,7 +5021,7 @@
       </p:sp>
       <p:sp>
         <p:nvSpPr>
-          <p:cNvPr id="9" name="TextBox 8"/>
+          <p:cNvPr id="10" name="TextBox 9"/>
           <p:cNvSpPr txBox="1"/>
           <p:nvPr/>
         </p:nvSpPr>
@@ -5032,7 +5056,7 @@
       </p:sp>
       <p:sp>
         <p:nvSpPr>
-          <p:cNvPr id="10" name="Rounded Rectangle 9"/>
+          <p:cNvPr id="11" name="Rounded Rectangle 10"/>
           <p:cNvSpPr/>
           <p:nvPr/>
         </p:nvSpPr>
@@ -5084,7 +5108,7 @@
       </p:sp>
       <p:sp>
         <p:nvSpPr>
-          <p:cNvPr id="11" name="Rounded Rectangle 10"/>
+          <p:cNvPr id="12" name="Rounded Rectangle 11"/>
           <p:cNvSpPr/>
           <p:nvPr/>
         </p:nvSpPr>
@@ -5128,9 +5152,33 @@
           </a:p>
         </p:txBody>
       </p:sp>
-      <p:sp>
-        <p:nvSpPr>
-          <p:cNvPr id="12" name="TextBox 11"/>
+      <p:pic>
+        <p:nvPicPr>
+          <p:cNvPr id="13" name="Picture 12" descr="ray_FFFFFF.png"/>
+          <p:cNvPicPr>
+            <a:picLocks noChangeAspect="1"/>
+          </p:cNvPicPr>
+          <p:nvPr/>
+        </p:nvPicPr>
+        <p:blipFill>
+          <a:blip r:embed="rId2"/>
+          <a:stretch>
+            <a:fillRect/>
+          </a:stretch>
+        </p:blipFill>
+        <p:spPr>
+          <a:xfrm>
+            <a:off x="6648602" y="2323490"/>
+            <a:ext cx="281635" cy="281635"/>
+          </a:xfrm>
+          <a:prstGeom prst="rect">
+            <a:avLst/>
+          </a:prstGeom>
+        </p:spPr>
+      </p:pic>
+      <p:sp>
+        <p:nvSpPr>
+          <p:cNvPr id="14" name="TextBox 13"/>
           <p:cNvSpPr txBox="1"/>
           <p:nvPr/>
         </p:nvSpPr>
@@ -5165,7 +5213,7 @@
       </p:sp>
       <p:sp>
         <p:nvSpPr>
-          <p:cNvPr id="13" name="TextBox 12"/>
+          <p:cNvPr id="15" name="TextBox 14"/>
           <p:cNvSpPr txBox="1"/>
           <p:nvPr/>
         </p:nvSpPr>
@@ -5200,7 +5248,7 @@
       </p:sp>
       <p:sp>
         <p:nvSpPr>
-          <p:cNvPr id="14" name="Rounded Rectangle 13"/>
+          <p:cNvPr id="16" name="Rounded Rectangle 15"/>
           <p:cNvSpPr/>
           <p:nvPr/>
         </p:nvSpPr>
@@ -5252,7 +5300,7 @@
       </p:sp>
       <p:sp>
         <p:nvSpPr>
-          <p:cNvPr id="15" name="Rounded Rectangle 14"/>
+          <p:cNvPr id="17" name="Rounded Rectangle 16"/>
           <p:cNvSpPr/>
           <p:nvPr/>
         </p:nvSpPr>
@@ -5296,9 +5344,33 @@
           </a:p>
         </p:txBody>
       </p:sp>
-      <p:sp>
-        <p:nvSpPr>
-          <p:cNvPr id="16" name="TextBox 15"/>
+      <p:pic>
+        <p:nvPicPr>
+          <p:cNvPr id="18" name="Picture 17" descr="lens_FFFFFF.png"/>
+          <p:cNvPicPr>
+            <a:picLocks noChangeAspect="1"/>
+          </p:cNvPicPr>
+          <p:nvPr/>
+        </p:nvPicPr>
+        <p:blipFill>
+          <a:blip r:embed="rId3"/>
+          <a:stretch>
+            <a:fillRect/>
+          </a:stretch>
+        </p:blipFill>
+        <p:spPr>
+          <a:xfrm>
+            <a:off x="1070762" y="4152290"/>
+            <a:ext cx="281635" cy="281635"/>
+          </a:xfrm>
+          <a:prstGeom prst="rect">
+            <a:avLst/>
+          </a:prstGeom>
+        </p:spPr>
+      </p:pic>
+      <p:sp>
+        <p:nvSpPr>
+          <p:cNvPr id="19" name="TextBox 18"/>
           <p:cNvSpPr txBox="1"/>
           <p:nvPr/>
         </p:nvSpPr>
@@ -5333,7 +5405,7 @@
       </p:sp>
       <p:sp>
         <p:nvSpPr>
-          <p:cNvPr id="17" name="TextBox 16"/>
+          <p:cNvPr id="20" name="TextBox 19"/>
           <p:cNvSpPr txBox="1"/>
           <p:nvPr/>
         </p:nvSpPr>
@@ -5368,7 +5440,7 @@
       </p:sp>
       <p:sp>
         <p:nvSpPr>
-          <p:cNvPr id="18" name="Rounded Rectangle 17"/>
+          <p:cNvPr id="21" name="Rounded Rectangle 20"/>
           <p:cNvSpPr/>
           <p:nvPr/>
         </p:nvSpPr>
@@ -5420,7 +5492,7 @@
       </p:sp>
       <p:sp>
         <p:nvSpPr>
-          <p:cNvPr id="19" name="Rounded Rectangle 18"/>
+          <p:cNvPr id="22" name="Rounded Rectangle 21"/>
           <p:cNvSpPr/>
           <p:nvPr/>
         </p:nvSpPr>
@@ -5464,9 +5536,33 @@
           </a:p>
         </p:txBody>
       </p:sp>
-      <p:sp>
-        <p:nvSpPr>
-          <p:cNvPr id="20" name="TextBox 19"/>
+      <p:pic>
+        <p:nvPicPr>
+          <p:cNvPr id="23" name="Picture 22" descr="lens_FFFFFF.png"/>
+          <p:cNvPicPr>
+            <a:picLocks noChangeAspect="1"/>
+          </p:cNvPicPr>
+          <p:nvPr/>
+        </p:nvPicPr>
+        <p:blipFill>
+          <a:blip r:embed="rId3"/>
+          <a:stretch>
+            <a:fillRect/>
+          </a:stretch>
+        </p:blipFill>
+        <p:spPr>
+          <a:xfrm>
+            <a:off x="6648602" y="4152290"/>
+            <a:ext cx="281635" cy="281635"/>
+          </a:xfrm>
+          <a:prstGeom prst="rect">
+            <a:avLst/>
+          </a:prstGeom>
+        </p:spPr>
+      </p:pic>
+      <p:sp>
+        <p:nvSpPr>
+          <p:cNvPr id="24" name="TextBox 23"/>
           <p:cNvSpPr txBox="1"/>
           <p:nvPr/>
         </p:nvSpPr>
@@ -5501,7 +5597,7 @@
       </p:sp>
       <p:sp>
         <p:nvSpPr>
-          <p:cNvPr id="21" name="TextBox 20"/>
+          <p:cNvPr id="25" name="TextBox 24"/>
           <p:cNvSpPr txBox="1"/>
           <p:nvPr/>
         </p:nvSpPr>
@@ -5669,7 +5765,7 @@
                 </a:solidFill>
                 <a:latin typeface="Calibri"/>
               </a:rPr>
-              <a:t>Quick Check — Lens Basics</a:t>
+              <a:t>Check Your Understanding</a:t>
             </a:r>
           </a:p>
         </p:txBody>
@@ -5888,7 +5984,7 @@
                 </a:solidFill>
                 <a:latin typeface="Calibri"/>
               </a:rPr>
-              <a:t>Q1 — Lens Type</a:t>
+              <a:t>Q1 — Predict the Image</a:t>
             </a:r>
           </a:p>
         </p:txBody>
@@ -5975,7 +6071,7 @@
                 </a:solidFill>
                 <a:latin typeface="Calibri"/>
               </a:rPr>
-              <a:t>A lens that is thicker in the middle than at the edges is a:</a:t>
+              <a:t>An object is placed 25 cm from a convex lens of focal length 10 cm. Without calculating, what is the image like?</a:t>
             </a:r>
           </a:p>
         </p:txBody>
@@ -6135,7 +6231,7 @@
                 </a:solidFill>
                 <a:latin typeface="Calibri"/>
               </a:rPr>
-              <a:t>Concave lens</a:t>
+              <a:t>Real, inverted and diminished</a:t>
             </a:r>
           </a:p>
         </p:txBody>
@@ -6295,7 +6391,7 @@
                 </a:solidFill>
                 <a:latin typeface="Calibri"/>
               </a:rPr>
-              <a:t>Convex lens</a:t>
+              <a:t>Real, inverted and magnified</a:t>
             </a:r>
           </a:p>
         </p:txBody>
@@ -6455,7 +6551,7 @@
                 </a:solidFill>
                 <a:latin typeface="Calibri"/>
               </a:rPr>
-              <a:t>Plane lens</a:t>
+              <a:t>Virtual, erect and magnified</a:t>
             </a:r>
           </a:p>
         </p:txBody>
@@ -6615,7 +6711,7 @@
                 </a:solidFill>
                 <a:latin typeface="Calibri"/>
               </a:rPr>
-              <a:t>Diverging lens</a:t>
+              <a:t>No image is formed</a:t>
             </a:r>
           </a:p>
         </p:txBody>
@@ -6799,7 +6895,7 @@
                 </a:solidFill>
                 <a:latin typeface="Calibri"/>
               </a:rPr>
-              <a:t>Q1 — Lens Type</a:t>
+              <a:t>Q1 — Predict the Image</a:t>
             </a:r>
           </a:p>
         </p:txBody>
@@ -6886,7 +6982,7 @@
                 </a:solidFill>
                 <a:latin typeface="Calibri"/>
               </a:rPr>
-              <a:t>A lens that is thicker in the middle than at the edges is a:</a:t>
+              <a:t>An object is placed 25 cm from a convex lens of focal length 10 cm. Without calculating, what is the image like?</a:t>
             </a:r>
           </a:p>
         </p:txBody>
@@ -6900,166 +6996,6 @@
         <p:spPr>
           <a:xfrm>
             <a:off x="640080" y="3337560"/>
-            <a:ext cx="5349240" cy="868680"/>
-          </a:xfrm>
-          <a:prstGeom prst="roundRect">
-            <a:avLst>
-              <a:gd name="adj" fmla="val 12000"/>
-            </a:avLst>
-          </a:prstGeom>
-          <a:solidFill>
-            <a:srgbClr val="EAF1F4"/>
-          </a:solidFill>
-          <a:ln>
-            <a:noFill/>
-          </a:ln>
-          <a:effectLst/>
-        </p:spPr>
-        <p:style>
-          <a:lnRef idx="1">
-            <a:schemeClr val="accent1"/>
-          </a:lnRef>
-          <a:fillRef idx="3">
-            <a:schemeClr val="accent1"/>
-          </a:fillRef>
-          <a:effectRef idx="2">
-            <a:schemeClr val="accent1"/>
-          </a:effectRef>
-          <a:fontRef idx="minor">
-            <a:schemeClr val="lt1"/>
-          </a:fontRef>
-        </p:style>
-        <p:txBody>
-          <a:bodyPr rtlCol="0" anchor="ctr"/>
-          <a:lstStyle/>
-          <a:p>
-            <a:pPr algn="ctr"/>
-          </a:p>
-        </p:txBody>
-      </p:sp>
-      <p:sp>
-        <p:nvSpPr>
-          <p:cNvPr id="9" name="Oval 8"/>
-          <p:cNvSpPr/>
-          <p:nvPr/>
-        </p:nvSpPr>
-        <p:spPr>
-          <a:xfrm>
-            <a:off x="914400" y="3566160"/>
-            <a:ext cx="411480" cy="411480"/>
-          </a:xfrm>
-          <a:prstGeom prst="ellipse">
-            <a:avLst/>
-          </a:prstGeom>
-          <a:solidFill>
-            <a:srgbClr val="B7C2CC"/>
-          </a:solidFill>
-          <a:ln>
-            <a:noFill/>
-          </a:ln>
-          <a:effectLst/>
-        </p:spPr>
-        <p:style>
-          <a:lnRef idx="1">
-            <a:schemeClr val="accent1"/>
-          </a:lnRef>
-          <a:fillRef idx="3">
-            <a:schemeClr val="accent1"/>
-          </a:fillRef>
-          <a:effectRef idx="2">
-            <a:schemeClr val="accent1"/>
-          </a:effectRef>
-          <a:fontRef idx="minor">
-            <a:schemeClr val="lt1"/>
-          </a:fontRef>
-        </p:style>
-        <p:txBody>
-          <a:bodyPr rtlCol="0" anchor="ctr"/>
-          <a:lstStyle/>
-          <a:p>
-            <a:pPr algn="ctr"/>
-          </a:p>
-        </p:txBody>
-      </p:sp>
-      <p:sp>
-        <p:nvSpPr>
-          <p:cNvPr id="10" name="TextBox 9"/>
-          <p:cNvSpPr txBox="1"/>
-          <p:nvPr/>
-        </p:nvSpPr>
-        <p:spPr>
-          <a:xfrm>
-            <a:off x="914400" y="3566160"/>
-            <a:ext cx="411480" cy="411480"/>
-          </a:xfrm>
-          <a:prstGeom prst="rect">
-            <a:avLst/>
-          </a:prstGeom>
-          <a:noFill/>
-        </p:spPr>
-        <p:txBody>
-          <a:bodyPr wrap="square" anchor="ctr" lIns="0" rIns="0" tIns="0" bIns="0">
-            <a:spAutoFit/>
-          </a:bodyPr>
-          <a:lstStyle/>
-          <a:p>
-            <a:pPr algn="ctr"/>
-            <a:r>
-              <a:rPr sz="1400" b="1" i="0">
-                <a:solidFill>
-                  <a:srgbClr val="FFFFFF"/>
-                </a:solidFill>
-                <a:latin typeface="Calibri"/>
-              </a:rPr>
-              <a:t>A</a:t>
-            </a:r>
-          </a:p>
-        </p:txBody>
-      </p:sp>
-      <p:sp>
-        <p:nvSpPr>
-          <p:cNvPr id="11" name="TextBox 10"/>
-          <p:cNvSpPr txBox="1"/>
-          <p:nvPr/>
-        </p:nvSpPr>
-        <p:spPr>
-          <a:xfrm>
-            <a:off x="1508760" y="3337560"/>
-            <a:ext cx="4297680" cy="868680"/>
-          </a:xfrm>
-          <a:prstGeom prst="rect">
-            <a:avLst/>
-          </a:prstGeom>
-          <a:noFill/>
-        </p:spPr>
-        <p:txBody>
-          <a:bodyPr wrap="square" anchor="ctr" lIns="0" rIns="0" tIns="0" bIns="0">
-            <a:spAutoFit/>
-          </a:bodyPr>
-          <a:lstStyle/>
-          <a:p>
-            <a:pPr algn="l"/>
-            <a:r>
-              <a:rPr sz="1450" b="0" i="0">
-                <a:solidFill>
-                  <a:srgbClr val="6B7280"/>
-                </a:solidFill>
-                <a:latin typeface="Calibri"/>
-              </a:rPr>
-              <a:t>Concave lens</a:t>
-            </a:r>
-          </a:p>
-        </p:txBody>
-      </p:sp>
-      <p:sp>
-        <p:nvSpPr>
-          <p:cNvPr id="12" name="Rounded Rectangle 11"/>
-          <p:cNvSpPr/>
-          <p:nvPr/>
-        </p:nvSpPr>
-        <p:spPr>
-          <a:xfrm>
-            <a:off x="6172200" y="3337560"/>
             <a:ext cx="5349240" cy="868680"/>
           </a:xfrm>
           <a:prstGeom prst="roundRect">
@@ -7101,13 +7037,13 @@
       </p:sp>
       <p:sp>
         <p:nvSpPr>
-          <p:cNvPr id="13" name="Oval 12"/>
+          <p:cNvPr id="9" name="Oval 8"/>
           <p:cNvSpPr/>
           <p:nvPr/>
         </p:nvSpPr>
         <p:spPr>
           <a:xfrm>
-            <a:off x="6446520" y="3566160"/>
+            <a:off x="914400" y="3566160"/>
             <a:ext cx="411480" cy="411480"/>
           </a:xfrm>
           <a:prstGeom prst="ellipse">
@@ -7145,13 +7081,13 @@
       </p:sp>
       <p:sp>
         <p:nvSpPr>
-          <p:cNvPr id="14" name="TextBox 13"/>
+          <p:cNvPr id="10" name="TextBox 9"/>
           <p:cNvSpPr txBox="1"/>
           <p:nvPr/>
         </p:nvSpPr>
         <p:spPr>
           <a:xfrm>
-            <a:off x="6446520" y="3566160"/>
+            <a:off x="914400" y="3566160"/>
             <a:ext cx="411480" cy="411480"/>
           </a:xfrm>
           <a:prstGeom prst="rect">
@@ -7180,13 +7116,13 @@
       </p:sp>
       <p:sp>
         <p:nvSpPr>
-          <p:cNvPr id="15" name="TextBox 14"/>
+          <p:cNvPr id="11" name="TextBox 10"/>
           <p:cNvSpPr txBox="1"/>
           <p:nvPr/>
         </p:nvSpPr>
         <p:spPr>
           <a:xfrm>
-            <a:off x="7040880" y="3337560"/>
+            <a:off x="1508760" y="3337560"/>
             <a:ext cx="4297680" cy="868680"/>
           </a:xfrm>
           <a:prstGeom prst="rect">
@@ -7208,20 +7144,20 @@
                 </a:solidFill>
                 <a:latin typeface="Calibri"/>
               </a:rPr>
-              <a:t>Convex lens</a:t>
-            </a:r>
-          </a:p>
-        </p:txBody>
-      </p:sp>
-      <p:sp>
-        <p:nvSpPr>
-          <p:cNvPr id="16" name="Rounded Rectangle 15"/>
+              <a:t>Real, inverted and diminished</a:t>
+            </a:r>
+          </a:p>
+        </p:txBody>
+      </p:sp>
+      <p:sp>
+        <p:nvSpPr>
+          <p:cNvPr id="12" name="Rounded Rectangle 11"/>
           <p:cNvSpPr/>
           <p:nvPr/>
         </p:nvSpPr>
         <p:spPr>
           <a:xfrm>
-            <a:off x="640080" y="4370831"/>
+            <a:off x="6172200" y="3337560"/>
             <a:ext cx="5349240" cy="868680"/>
           </a:xfrm>
           <a:prstGeom prst="roundRect">
@@ -7261,13 +7197,13 @@
       </p:sp>
       <p:sp>
         <p:nvSpPr>
-          <p:cNvPr id="17" name="Oval 16"/>
+          <p:cNvPr id="13" name="Oval 12"/>
           <p:cNvSpPr/>
           <p:nvPr/>
         </p:nvSpPr>
         <p:spPr>
           <a:xfrm>
-            <a:off x="914400" y="4599431"/>
+            <a:off x="6446520" y="3566160"/>
             <a:ext cx="411480" cy="411480"/>
           </a:xfrm>
           <a:prstGeom prst="ellipse">
@@ -7305,13 +7241,13 @@
       </p:sp>
       <p:sp>
         <p:nvSpPr>
-          <p:cNvPr id="18" name="TextBox 17"/>
+          <p:cNvPr id="14" name="TextBox 13"/>
           <p:cNvSpPr txBox="1"/>
           <p:nvPr/>
         </p:nvSpPr>
         <p:spPr>
           <a:xfrm>
-            <a:off x="914400" y="4599431"/>
+            <a:off x="6446520" y="3566160"/>
             <a:ext cx="411480" cy="411480"/>
           </a:xfrm>
           <a:prstGeom prst="rect">
@@ -7333,20 +7269,20 @@
                 </a:solidFill>
                 <a:latin typeface="Calibri"/>
               </a:rPr>
-              <a:t>C</a:t>
-            </a:r>
-          </a:p>
-        </p:txBody>
-      </p:sp>
-      <p:sp>
-        <p:nvSpPr>
-          <p:cNvPr id="19" name="TextBox 18"/>
+              <a:t>B</a:t>
+            </a:r>
+          </a:p>
+        </p:txBody>
+      </p:sp>
+      <p:sp>
+        <p:nvSpPr>
+          <p:cNvPr id="15" name="TextBox 14"/>
           <p:cNvSpPr txBox="1"/>
           <p:nvPr/>
         </p:nvSpPr>
         <p:spPr>
           <a:xfrm>
-            <a:off x="1508760" y="4370831"/>
+            <a:off x="7040880" y="3337560"/>
             <a:ext cx="4297680" cy="868680"/>
           </a:xfrm>
           <a:prstGeom prst="rect">
@@ -7368,20 +7304,20 @@
                 </a:solidFill>
                 <a:latin typeface="Calibri"/>
               </a:rPr>
-              <a:t>Plane lens</a:t>
-            </a:r>
-          </a:p>
-        </p:txBody>
-      </p:sp>
-      <p:sp>
-        <p:nvSpPr>
-          <p:cNvPr id="20" name="Rounded Rectangle 19"/>
+              <a:t>Real, inverted and magnified</a:t>
+            </a:r>
+          </a:p>
+        </p:txBody>
+      </p:sp>
+      <p:sp>
+        <p:nvSpPr>
+          <p:cNvPr id="16" name="Rounded Rectangle 15"/>
           <p:cNvSpPr/>
           <p:nvPr/>
         </p:nvSpPr>
         <p:spPr>
           <a:xfrm>
-            <a:off x="6172200" y="4370831"/>
+            <a:off x="640080" y="4370831"/>
             <a:ext cx="5349240" cy="868680"/>
           </a:xfrm>
           <a:prstGeom prst="roundRect">
@@ -7421,13 +7357,13 @@
       </p:sp>
       <p:sp>
         <p:nvSpPr>
-          <p:cNvPr id="21" name="Oval 20"/>
+          <p:cNvPr id="17" name="Oval 16"/>
           <p:cNvSpPr/>
           <p:nvPr/>
         </p:nvSpPr>
         <p:spPr>
           <a:xfrm>
-            <a:off x="6446520" y="4599431"/>
+            <a:off x="914400" y="4599431"/>
             <a:ext cx="411480" cy="411480"/>
           </a:xfrm>
           <a:prstGeom prst="ellipse">
@@ -7465,13 +7401,13 @@
       </p:sp>
       <p:sp>
         <p:nvSpPr>
-          <p:cNvPr id="22" name="TextBox 21"/>
+          <p:cNvPr id="18" name="TextBox 17"/>
           <p:cNvSpPr txBox="1"/>
           <p:nvPr/>
         </p:nvSpPr>
         <p:spPr>
           <a:xfrm>
-            <a:off x="6446520" y="4599431"/>
+            <a:off x="914400" y="4599431"/>
             <a:ext cx="411480" cy="411480"/>
           </a:xfrm>
           <a:prstGeom prst="rect">
@@ -7493,20 +7429,20 @@
                 </a:solidFill>
                 <a:latin typeface="Calibri"/>
               </a:rPr>
-              <a:t>D</a:t>
-            </a:r>
-          </a:p>
-        </p:txBody>
-      </p:sp>
-      <p:sp>
-        <p:nvSpPr>
-          <p:cNvPr id="23" name="TextBox 22"/>
+              <a:t>C</a:t>
+            </a:r>
+          </a:p>
+        </p:txBody>
+      </p:sp>
+      <p:sp>
+        <p:nvSpPr>
+          <p:cNvPr id="19" name="TextBox 18"/>
           <p:cNvSpPr txBox="1"/>
           <p:nvPr/>
         </p:nvSpPr>
         <p:spPr>
           <a:xfrm>
-            <a:off x="7040880" y="4370831"/>
+            <a:off x="1508760" y="4370831"/>
             <a:ext cx="4297680" cy="868680"/>
           </a:xfrm>
           <a:prstGeom prst="rect">
@@ -7528,7 +7464,167 @@
                 </a:solidFill>
                 <a:latin typeface="Calibri"/>
               </a:rPr>
-              <a:t>Diverging lens</a:t>
+              <a:t>Virtual, erect and magnified</a:t>
+            </a:r>
+          </a:p>
+        </p:txBody>
+      </p:sp>
+      <p:sp>
+        <p:nvSpPr>
+          <p:cNvPr id="20" name="Rounded Rectangle 19"/>
+          <p:cNvSpPr/>
+          <p:nvPr/>
+        </p:nvSpPr>
+        <p:spPr>
+          <a:xfrm>
+            <a:off x="6172200" y="4370831"/>
+            <a:ext cx="5349240" cy="868680"/>
+          </a:xfrm>
+          <a:prstGeom prst="roundRect">
+            <a:avLst>
+              <a:gd name="adj" fmla="val 12000"/>
+            </a:avLst>
+          </a:prstGeom>
+          <a:solidFill>
+            <a:srgbClr val="EAF1F4"/>
+          </a:solidFill>
+          <a:ln>
+            <a:noFill/>
+          </a:ln>
+          <a:effectLst/>
+        </p:spPr>
+        <p:style>
+          <a:lnRef idx="1">
+            <a:schemeClr val="accent1"/>
+          </a:lnRef>
+          <a:fillRef idx="3">
+            <a:schemeClr val="accent1"/>
+          </a:fillRef>
+          <a:effectRef idx="2">
+            <a:schemeClr val="accent1"/>
+          </a:effectRef>
+          <a:fontRef idx="minor">
+            <a:schemeClr val="lt1"/>
+          </a:fontRef>
+        </p:style>
+        <p:txBody>
+          <a:bodyPr rtlCol="0" anchor="ctr"/>
+          <a:lstStyle/>
+          <a:p>
+            <a:pPr algn="ctr"/>
+          </a:p>
+        </p:txBody>
+      </p:sp>
+      <p:sp>
+        <p:nvSpPr>
+          <p:cNvPr id="21" name="Oval 20"/>
+          <p:cNvSpPr/>
+          <p:nvPr/>
+        </p:nvSpPr>
+        <p:spPr>
+          <a:xfrm>
+            <a:off x="6446520" y="4599431"/>
+            <a:ext cx="411480" cy="411480"/>
+          </a:xfrm>
+          <a:prstGeom prst="ellipse">
+            <a:avLst/>
+          </a:prstGeom>
+          <a:solidFill>
+            <a:srgbClr val="B7C2CC"/>
+          </a:solidFill>
+          <a:ln>
+            <a:noFill/>
+          </a:ln>
+          <a:effectLst/>
+        </p:spPr>
+        <p:style>
+          <a:lnRef idx="1">
+            <a:schemeClr val="accent1"/>
+          </a:lnRef>
+          <a:fillRef idx="3">
+            <a:schemeClr val="accent1"/>
+          </a:fillRef>
+          <a:effectRef idx="2">
+            <a:schemeClr val="accent1"/>
+          </a:effectRef>
+          <a:fontRef idx="minor">
+            <a:schemeClr val="lt1"/>
+          </a:fontRef>
+        </p:style>
+        <p:txBody>
+          <a:bodyPr rtlCol="0" anchor="ctr"/>
+          <a:lstStyle/>
+          <a:p>
+            <a:pPr algn="ctr"/>
+          </a:p>
+        </p:txBody>
+      </p:sp>
+      <p:sp>
+        <p:nvSpPr>
+          <p:cNvPr id="22" name="TextBox 21"/>
+          <p:cNvSpPr txBox="1"/>
+          <p:nvPr/>
+        </p:nvSpPr>
+        <p:spPr>
+          <a:xfrm>
+            <a:off x="6446520" y="4599431"/>
+            <a:ext cx="411480" cy="411480"/>
+          </a:xfrm>
+          <a:prstGeom prst="rect">
+            <a:avLst/>
+          </a:prstGeom>
+          <a:noFill/>
+        </p:spPr>
+        <p:txBody>
+          <a:bodyPr wrap="square" anchor="ctr" lIns="0" rIns="0" tIns="0" bIns="0">
+            <a:spAutoFit/>
+          </a:bodyPr>
+          <a:lstStyle/>
+          <a:p>
+            <a:pPr algn="ctr"/>
+            <a:r>
+              <a:rPr sz="1400" b="1" i="0">
+                <a:solidFill>
+                  <a:srgbClr val="FFFFFF"/>
+                </a:solidFill>
+                <a:latin typeface="Calibri"/>
+              </a:rPr>
+              <a:t>D</a:t>
+            </a:r>
+          </a:p>
+        </p:txBody>
+      </p:sp>
+      <p:sp>
+        <p:nvSpPr>
+          <p:cNvPr id="23" name="TextBox 22"/>
+          <p:cNvSpPr txBox="1"/>
+          <p:nvPr/>
+        </p:nvSpPr>
+        <p:spPr>
+          <a:xfrm>
+            <a:off x="7040880" y="4370831"/>
+            <a:ext cx="4297680" cy="868680"/>
+          </a:xfrm>
+          <a:prstGeom prst="rect">
+            <a:avLst/>
+          </a:prstGeom>
+          <a:noFill/>
+        </p:spPr>
+        <p:txBody>
+          <a:bodyPr wrap="square" anchor="ctr" lIns="0" rIns="0" tIns="0" bIns="0">
+            <a:spAutoFit/>
+          </a:bodyPr>
+          <a:lstStyle/>
+          <a:p>
+            <a:pPr algn="l"/>
+            <a:r>
+              <a:rPr sz="1450" b="0" i="0">
+                <a:solidFill>
+                  <a:srgbClr val="6B7280"/>
+                </a:solidFill>
+                <a:latin typeface="Calibri"/>
+              </a:rPr>
+              <a:t>No image is formed</a:t>
             </a:r>
           </a:p>
         </p:txBody>
@@ -7654,7 +7750,7 @@
                 </a:solidFill>
                 <a:latin typeface="Calibri"/>
               </a:rPr>
-              <a:t>A convex lens is thicker in the middle. It converges parallel rays to a real focus, so it is also called a converging lens.</a:t>
+              <a:t>f = 10 cm, so 2F = 20 cm. The object (25 cm) lies beyond 2F, so the image is real, inverted and diminished — the camera case. Knowing the 2F landmark lets you predict this without any arithmetic.</a:t>
             </a:r>
           </a:p>
         </p:txBody>
@@ -7838,7 +7934,7 @@
                 </a:solidFill>
                 <a:latin typeface="Calibri"/>
               </a:rPr>
-              <a:t>Q2 — Central Ray</a:t>
+              <a:t>Q2 — Half-Covered Lens</a:t>
             </a:r>
           </a:p>
         </p:txBody>
@@ -7925,7 +8021,7 @@
                 </a:solidFill>
                 <a:latin typeface="Calibri"/>
               </a:rPr>
-              <a:t>A ray of light passing through the optical centre of a thin lens:</a:t>
+              <a:t>The lower half of a convex lens is covered with black paper. The image of an object will be:</a:t>
             </a:r>
           </a:p>
         </p:txBody>
@@ -8085,7 +8181,7 @@
                 </a:solidFill>
                 <a:latin typeface="Calibri"/>
               </a:rPr>
-              <a:t>Bends toward the axis</a:t>
+              <a:t>Only the top half of the object</a:t>
             </a:r>
           </a:p>
         </p:txBody>
@@ -8245,7 +8341,7 @@
                 </a:solidFill>
                 <a:latin typeface="Calibri"/>
               </a:rPr>
-              <a:t>Bends away from the axis</a:t>
+              <a:t>The complete image, but fainter (less bright)</a:t>
             </a:r>
           </a:p>
         </p:txBody>
@@ -8405,7 +8501,7 @@
                 </a:solidFill>
                 <a:latin typeface="Calibri"/>
               </a:rPr>
-              <a:t>Passes straight through, undeviated</a:t>
+              <a:t>Only the bottom half of the object</a:t>
             </a:r>
           </a:p>
         </p:txBody>
@@ -8565,7 +8661,7 @@
                 </a:solidFill>
                 <a:latin typeface="Calibri"/>
               </a:rPr>
-              <a:t>Is totally reflected</a:t>
+              <a:t>Turned the right way up</a:t>
             </a:r>
           </a:p>
         </p:txBody>
@@ -8749,7 +8845,7 @@
                 </a:solidFill>
                 <a:latin typeface="Calibri"/>
               </a:rPr>
-              <a:t>Q2 — Central Ray</a:t>
+              <a:t>Q2 — Half-Covered Lens</a:t>
             </a:r>
           </a:p>
         </p:txBody>
@@ -8836,7 +8932,7 @@
                 </a:solidFill>
                 <a:latin typeface="Calibri"/>
               </a:rPr>
-              <a:t>A ray of light passing through the optical centre of a thin lens:</a:t>
+              <a:t>The lower half of a convex lens is covered with black paper. The image of an object will be:</a:t>
             </a:r>
           </a:p>
         </p:txBody>
@@ -8996,7 +9092,7 @@
                 </a:solidFill>
                 <a:latin typeface="Calibri"/>
               </a:rPr>
-              <a:t>Bends toward the axis</a:t>
+              <a:t>Only the top half of the object</a:t>
             </a:r>
           </a:p>
         </p:txBody>
@@ -9010,166 +9106,6 @@
         <p:spPr>
           <a:xfrm>
             <a:off x="6172200" y="3337560"/>
-            <a:ext cx="5349240" cy="868680"/>
-          </a:xfrm>
-          <a:prstGeom prst="roundRect">
-            <a:avLst>
-              <a:gd name="adj" fmla="val 12000"/>
-            </a:avLst>
-          </a:prstGeom>
-          <a:solidFill>
-            <a:srgbClr val="EAF1F4"/>
-          </a:solidFill>
-          <a:ln>
-            <a:noFill/>
-          </a:ln>
-          <a:effectLst/>
-        </p:spPr>
-        <p:style>
-          <a:lnRef idx="1">
-            <a:schemeClr val="accent1"/>
-          </a:lnRef>
-          <a:fillRef idx="3">
-            <a:schemeClr val="accent1"/>
-          </a:fillRef>
-          <a:effectRef idx="2">
-            <a:schemeClr val="accent1"/>
-          </a:effectRef>
-          <a:fontRef idx="minor">
-            <a:schemeClr val="lt1"/>
-          </a:fontRef>
-        </p:style>
-        <p:txBody>
-          <a:bodyPr rtlCol="0" anchor="ctr"/>
-          <a:lstStyle/>
-          <a:p>
-            <a:pPr algn="ctr"/>
-          </a:p>
-        </p:txBody>
-      </p:sp>
-      <p:sp>
-        <p:nvSpPr>
-          <p:cNvPr id="13" name="Oval 12"/>
-          <p:cNvSpPr/>
-          <p:nvPr/>
-        </p:nvSpPr>
-        <p:spPr>
-          <a:xfrm>
-            <a:off x="6446520" y="3566160"/>
-            <a:ext cx="411480" cy="411480"/>
-          </a:xfrm>
-          <a:prstGeom prst="ellipse">
-            <a:avLst/>
-          </a:prstGeom>
-          <a:solidFill>
-            <a:srgbClr val="B7C2CC"/>
-          </a:solidFill>
-          <a:ln>
-            <a:noFill/>
-          </a:ln>
-          <a:effectLst/>
-        </p:spPr>
-        <p:style>
-          <a:lnRef idx="1">
-            <a:schemeClr val="accent1"/>
-          </a:lnRef>
-          <a:fillRef idx="3">
-            <a:schemeClr val="accent1"/>
-          </a:fillRef>
-          <a:effectRef idx="2">
-            <a:schemeClr val="accent1"/>
-          </a:effectRef>
-          <a:fontRef idx="minor">
-            <a:schemeClr val="lt1"/>
-          </a:fontRef>
-        </p:style>
-        <p:txBody>
-          <a:bodyPr rtlCol="0" anchor="ctr"/>
-          <a:lstStyle/>
-          <a:p>
-            <a:pPr algn="ctr"/>
-          </a:p>
-        </p:txBody>
-      </p:sp>
-      <p:sp>
-        <p:nvSpPr>
-          <p:cNvPr id="14" name="TextBox 13"/>
-          <p:cNvSpPr txBox="1"/>
-          <p:nvPr/>
-        </p:nvSpPr>
-        <p:spPr>
-          <a:xfrm>
-            <a:off x="6446520" y="3566160"/>
-            <a:ext cx="411480" cy="411480"/>
-          </a:xfrm>
-          <a:prstGeom prst="rect">
-            <a:avLst/>
-          </a:prstGeom>
-          <a:noFill/>
-        </p:spPr>
-        <p:txBody>
-          <a:bodyPr wrap="square" anchor="ctr" lIns="0" rIns="0" tIns="0" bIns="0">
-            <a:spAutoFit/>
-          </a:bodyPr>
-          <a:lstStyle/>
-          <a:p>
-            <a:pPr algn="ctr"/>
-            <a:r>
-              <a:rPr sz="1400" b="1" i="0">
-                <a:solidFill>
-                  <a:srgbClr val="FFFFFF"/>
-                </a:solidFill>
-                <a:latin typeface="Calibri"/>
-              </a:rPr>
-              <a:t>B</a:t>
-            </a:r>
-          </a:p>
-        </p:txBody>
-      </p:sp>
-      <p:sp>
-        <p:nvSpPr>
-          <p:cNvPr id="15" name="TextBox 14"/>
-          <p:cNvSpPr txBox="1"/>
-          <p:nvPr/>
-        </p:nvSpPr>
-        <p:spPr>
-          <a:xfrm>
-            <a:off x="7040880" y="3337560"/>
-            <a:ext cx="4297680" cy="868680"/>
-          </a:xfrm>
-          <a:prstGeom prst="rect">
-            <a:avLst/>
-          </a:prstGeom>
-          <a:noFill/>
-        </p:spPr>
-        <p:txBody>
-          <a:bodyPr wrap="square" anchor="ctr" lIns="0" rIns="0" tIns="0" bIns="0">
-            <a:spAutoFit/>
-          </a:bodyPr>
-          <a:lstStyle/>
-          <a:p>
-            <a:pPr algn="l"/>
-            <a:r>
-              <a:rPr sz="1450" b="0" i="0">
-                <a:solidFill>
-                  <a:srgbClr val="6B7280"/>
-                </a:solidFill>
-                <a:latin typeface="Calibri"/>
-              </a:rPr>
-              <a:t>Bends away from the axis</a:t>
-            </a:r>
-          </a:p>
-        </p:txBody>
-      </p:sp>
-      <p:sp>
-        <p:nvSpPr>
-          <p:cNvPr id="16" name="Rounded Rectangle 15"/>
-          <p:cNvSpPr/>
-          <p:nvPr/>
-        </p:nvSpPr>
-        <p:spPr>
-          <a:xfrm>
-            <a:off x="640080" y="4370831"/>
             <a:ext cx="5349240" cy="868680"/>
           </a:xfrm>
           <a:prstGeom prst="roundRect">
@@ -9211,13 +9147,13 @@
       </p:sp>
       <p:sp>
         <p:nvSpPr>
-          <p:cNvPr id="17" name="Oval 16"/>
+          <p:cNvPr id="13" name="Oval 12"/>
           <p:cNvSpPr/>
           <p:nvPr/>
         </p:nvSpPr>
         <p:spPr>
           <a:xfrm>
-            <a:off x="914400" y="4599431"/>
+            <a:off x="6446520" y="3566160"/>
             <a:ext cx="411480" cy="411480"/>
           </a:xfrm>
           <a:prstGeom prst="ellipse">
@@ -9255,13 +9191,13 @@
       </p:sp>
       <p:sp>
         <p:nvSpPr>
-          <p:cNvPr id="18" name="TextBox 17"/>
+          <p:cNvPr id="14" name="TextBox 13"/>
           <p:cNvSpPr txBox="1"/>
           <p:nvPr/>
         </p:nvSpPr>
         <p:spPr>
           <a:xfrm>
-            <a:off x="914400" y="4599431"/>
+            <a:off x="6446520" y="3566160"/>
             <a:ext cx="411480" cy="411480"/>
           </a:xfrm>
           <a:prstGeom prst="rect">
@@ -9290,13 +9226,13 @@
       </p:sp>
       <p:sp>
         <p:nvSpPr>
-          <p:cNvPr id="19" name="TextBox 18"/>
+          <p:cNvPr id="15" name="TextBox 14"/>
           <p:cNvSpPr txBox="1"/>
           <p:nvPr/>
         </p:nvSpPr>
         <p:spPr>
           <a:xfrm>
-            <a:off x="1508760" y="4370831"/>
+            <a:off x="7040880" y="3337560"/>
             <a:ext cx="4297680" cy="868680"/>
           </a:xfrm>
           <a:prstGeom prst="rect">
@@ -9318,20 +9254,20 @@
                 </a:solidFill>
                 <a:latin typeface="Calibri"/>
               </a:rPr>
-              <a:t>Passes straight through, undeviated</a:t>
-            </a:r>
-          </a:p>
-        </p:txBody>
-      </p:sp>
-      <p:sp>
-        <p:nvSpPr>
-          <p:cNvPr id="20" name="Rounded Rectangle 19"/>
+              <a:t>The complete image, but fainter (less bright)</a:t>
+            </a:r>
+          </a:p>
+        </p:txBody>
+      </p:sp>
+      <p:sp>
+        <p:nvSpPr>
+          <p:cNvPr id="16" name="Rounded Rectangle 15"/>
           <p:cNvSpPr/>
           <p:nvPr/>
         </p:nvSpPr>
         <p:spPr>
           <a:xfrm>
-            <a:off x="6172200" y="4370831"/>
+            <a:off x="640080" y="4370831"/>
             <a:ext cx="5349240" cy="868680"/>
           </a:xfrm>
           <a:prstGeom prst="roundRect">
@@ -9371,13 +9307,13 @@
       </p:sp>
       <p:sp>
         <p:nvSpPr>
-          <p:cNvPr id="21" name="Oval 20"/>
+          <p:cNvPr id="17" name="Oval 16"/>
           <p:cNvSpPr/>
           <p:nvPr/>
         </p:nvSpPr>
         <p:spPr>
           <a:xfrm>
-            <a:off x="6446520" y="4599431"/>
+            <a:off x="914400" y="4599431"/>
             <a:ext cx="411480" cy="411480"/>
           </a:xfrm>
           <a:prstGeom prst="ellipse">
@@ -9415,13 +9351,13 @@
       </p:sp>
       <p:sp>
         <p:nvSpPr>
-          <p:cNvPr id="22" name="TextBox 21"/>
+          <p:cNvPr id="18" name="TextBox 17"/>
           <p:cNvSpPr txBox="1"/>
           <p:nvPr/>
         </p:nvSpPr>
         <p:spPr>
           <a:xfrm>
-            <a:off x="6446520" y="4599431"/>
+            <a:off x="914400" y="4599431"/>
             <a:ext cx="411480" cy="411480"/>
           </a:xfrm>
           <a:prstGeom prst="rect">
@@ -9443,20 +9379,20 @@
                 </a:solidFill>
                 <a:latin typeface="Calibri"/>
               </a:rPr>
-              <a:t>D</a:t>
-            </a:r>
-          </a:p>
-        </p:txBody>
-      </p:sp>
-      <p:sp>
-        <p:nvSpPr>
-          <p:cNvPr id="23" name="TextBox 22"/>
+              <a:t>C</a:t>
+            </a:r>
+          </a:p>
+        </p:txBody>
+      </p:sp>
+      <p:sp>
+        <p:nvSpPr>
+          <p:cNvPr id="19" name="TextBox 18"/>
           <p:cNvSpPr txBox="1"/>
           <p:nvPr/>
         </p:nvSpPr>
         <p:spPr>
           <a:xfrm>
-            <a:off x="7040880" y="4370831"/>
+            <a:off x="1508760" y="4370831"/>
             <a:ext cx="4297680" cy="868680"/>
           </a:xfrm>
           <a:prstGeom prst="rect">
@@ -9478,7 +9414,167 @@
                 </a:solidFill>
                 <a:latin typeface="Calibri"/>
               </a:rPr>
-              <a:t>Is totally reflected</a:t>
+              <a:t>Only the bottom half of the object</a:t>
+            </a:r>
+          </a:p>
+        </p:txBody>
+      </p:sp>
+      <p:sp>
+        <p:nvSpPr>
+          <p:cNvPr id="20" name="Rounded Rectangle 19"/>
+          <p:cNvSpPr/>
+          <p:nvPr/>
+        </p:nvSpPr>
+        <p:spPr>
+          <a:xfrm>
+            <a:off x="6172200" y="4370831"/>
+            <a:ext cx="5349240" cy="868680"/>
+          </a:xfrm>
+          <a:prstGeom prst="roundRect">
+            <a:avLst>
+              <a:gd name="adj" fmla="val 12000"/>
+            </a:avLst>
+          </a:prstGeom>
+          <a:solidFill>
+            <a:srgbClr val="EAF1F4"/>
+          </a:solidFill>
+          <a:ln>
+            <a:noFill/>
+          </a:ln>
+          <a:effectLst/>
+        </p:spPr>
+        <p:style>
+          <a:lnRef idx="1">
+            <a:schemeClr val="accent1"/>
+          </a:lnRef>
+          <a:fillRef idx="3">
+            <a:schemeClr val="accent1"/>
+          </a:fillRef>
+          <a:effectRef idx="2">
+            <a:schemeClr val="accent1"/>
+          </a:effectRef>
+          <a:fontRef idx="minor">
+            <a:schemeClr val="lt1"/>
+          </a:fontRef>
+        </p:style>
+        <p:txBody>
+          <a:bodyPr rtlCol="0" anchor="ctr"/>
+          <a:lstStyle/>
+          <a:p>
+            <a:pPr algn="ctr"/>
+          </a:p>
+        </p:txBody>
+      </p:sp>
+      <p:sp>
+        <p:nvSpPr>
+          <p:cNvPr id="21" name="Oval 20"/>
+          <p:cNvSpPr/>
+          <p:nvPr/>
+        </p:nvSpPr>
+        <p:spPr>
+          <a:xfrm>
+            <a:off x="6446520" y="4599431"/>
+            <a:ext cx="411480" cy="411480"/>
+          </a:xfrm>
+          <a:prstGeom prst="ellipse">
+            <a:avLst/>
+          </a:prstGeom>
+          <a:solidFill>
+            <a:srgbClr val="B7C2CC"/>
+          </a:solidFill>
+          <a:ln>
+            <a:noFill/>
+          </a:ln>
+          <a:effectLst/>
+        </p:spPr>
+        <p:style>
+          <a:lnRef idx="1">
+            <a:schemeClr val="accent1"/>
+          </a:lnRef>
+          <a:fillRef idx="3">
+            <a:schemeClr val="accent1"/>
+          </a:fillRef>
+          <a:effectRef idx="2">
+            <a:schemeClr val="accent1"/>
+          </a:effectRef>
+          <a:fontRef idx="minor">
+            <a:schemeClr val="lt1"/>
+          </a:fontRef>
+        </p:style>
+        <p:txBody>
+          <a:bodyPr rtlCol="0" anchor="ctr"/>
+          <a:lstStyle/>
+          <a:p>
+            <a:pPr algn="ctr"/>
+          </a:p>
+        </p:txBody>
+      </p:sp>
+      <p:sp>
+        <p:nvSpPr>
+          <p:cNvPr id="22" name="TextBox 21"/>
+          <p:cNvSpPr txBox="1"/>
+          <p:nvPr/>
+        </p:nvSpPr>
+        <p:spPr>
+          <a:xfrm>
+            <a:off x="6446520" y="4599431"/>
+            <a:ext cx="411480" cy="411480"/>
+          </a:xfrm>
+          <a:prstGeom prst="rect">
+            <a:avLst/>
+          </a:prstGeom>
+          <a:noFill/>
+        </p:spPr>
+        <p:txBody>
+          <a:bodyPr wrap="square" anchor="ctr" lIns="0" rIns="0" tIns="0" bIns="0">
+            <a:spAutoFit/>
+          </a:bodyPr>
+          <a:lstStyle/>
+          <a:p>
+            <a:pPr algn="ctr"/>
+            <a:r>
+              <a:rPr sz="1400" b="1" i="0">
+                <a:solidFill>
+                  <a:srgbClr val="FFFFFF"/>
+                </a:solidFill>
+                <a:latin typeface="Calibri"/>
+              </a:rPr>
+              <a:t>D</a:t>
+            </a:r>
+          </a:p>
+        </p:txBody>
+      </p:sp>
+      <p:sp>
+        <p:nvSpPr>
+          <p:cNvPr id="23" name="TextBox 22"/>
+          <p:cNvSpPr txBox="1"/>
+          <p:nvPr/>
+        </p:nvSpPr>
+        <p:spPr>
+          <a:xfrm>
+            <a:off x="7040880" y="4370831"/>
+            <a:ext cx="4297680" cy="868680"/>
+          </a:xfrm>
+          <a:prstGeom prst="rect">
+            <a:avLst/>
+          </a:prstGeom>
+          <a:noFill/>
+        </p:spPr>
+        <p:txBody>
+          <a:bodyPr wrap="square" anchor="ctr" lIns="0" rIns="0" tIns="0" bIns="0">
+            <a:spAutoFit/>
+          </a:bodyPr>
+          <a:lstStyle/>
+          <a:p>
+            <a:pPr algn="l"/>
+            <a:r>
+              <a:rPr sz="1450" b="0" i="0">
+                <a:solidFill>
+                  <a:srgbClr val="6B7280"/>
+                </a:solidFill>
+                <a:latin typeface="Calibri"/>
+              </a:rPr>
+              <a:t>Turned the right way up</a:t>
             </a:r>
           </a:p>
         </p:txBody>
@@ -9604,7 +9700,7 @@
                 </a:solidFill>
                 <a:latin typeface="Calibri"/>
               </a:rPr>
-              <a:t>At the optical centre the two lens surfaces are parallel, so a ray through O emerges along the same line (with only a tiny, ignorable shift in a thin lens).</a:t>
+              <a:t>Every part of the lens collects light from the whole object, so the uncovered half still forms a complete image. With fewer rays reaching it, the image is simply dimmer — a classic conceptual trap.</a:t>
             </a:r>
           </a:p>
         </p:txBody>
@@ -9788,7 +9884,7 @@
                 </a:solidFill>
                 <a:latin typeface="Calibri"/>
               </a:rPr>
-              <a:t>Q3 — Focus</a:t>
+              <a:t>Q3 — Which Lens Bends More?</a:t>
             </a:r>
           </a:p>
         </p:txBody>
@@ -9875,7 +9971,7 @@
                 </a:solidFill>
                 <a:latin typeface="Calibri"/>
               </a:rPr>
-              <a:t>The principal focus of a convex lens is the point where:</a:t>
+              <a:t>Two convex lenses are identical in size, but lens X is fatter (more sharply curved) than lens Y. Compared with Y, lens X has a:</a:t>
             </a:r>
           </a:p>
         </p:txBody>
@@ -10035,7 +10131,7 @@
                 </a:solidFill>
                 <a:latin typeface="Calibri"/>
               </a:rPr>
-              <a:t>The lens is thickest</a:t>
+              <a:t>Longer focal length</a:t>
             </a:r>
           </a:p>
         </p:txBody>
@@ -10195,7 +10291,7 @@
                 </a:solidFill>
                 <a:latin typeface="Calibri"/>
               </a:rPr>
-              <a:t>Parallel rays meet after refraction</a:t>
+              <a:t>Shorter focal length</a:t>
             </a:r>
           </a:p>
         </p:txBody>
@@ -10355,7 +10451,7 @@
                 </a:solidFill>
                 <a:latin typeface="Calibri"/>
               </a:rPr>
-              <a:t>The object is placed</a:t>
+              <a:t>Larger optical centre</a:t>
             </a:r>
           </a:p>
         </p:txBody>
@@ -10515,7 +10611,7 @@
                 </a:solidFill>
                 <a:latin typeface="Calibri"/>
               </a:rPr>
-              <a:t>Light is totally reflected</a:t>
+              <a:t>Weaker converging power</a:t>
             </a:r>
           </a:p>
         </p:txBody>
@@ -10699,7 +10795,7 @@
                 </a:solidFill>
                 <a:latin typeface="Calibri"/>
               </a:rPr>
-              <a:t>Q3 — Focus</a:t>
+              <a:t>Q3 — Which Lens Bends More?</a:t>
             </a:r>
           </a:p>
         </p:txBody>
@@ -10786,7 +10882,7 @@
                 </a:solidFill>
                 <a:latin typeface="Calibri"/>
               </a:rPr>
-              <a:t>The principal focus of a convex lens is the point where:</a:t>
+              <a:t>Two convex lenses are identical in size, but lens X is fatter (more sharply curved) than lens Y. Compared with Y, lens X has a:</a:t>
             </a:r>
           </a:p>
         </p:txBody>
@@ -10946,7 +11042,7 @@
                 </a:solidFill>
                 <a:latin typeface="Calibri"/>
               </a:rPr>
-              <a:t>The lens is thickest</a:t>
+              <a:t>Longer focal length</a:t>
             </a:r>
           </a:p>
         </p:txBody>
@@ -11108,7 +11204,7 @@
                 </a:solidFill>
                 <a:latin typeface="Calibri"/>
               </a:rPr>
-              <a:t>Parallel rays meet after refraction</a:t>
+              <a:t>Shorter focal length</a:t>
             </a:r>
           </a:p>
         </p:txBody>
@@ -11268,7 +11364,7 @@
                 </a:solidFill>
                 <a:latin typeface="Calibri"/>
               </a:rPr>
-              <a:t>The object is placed</a:t>
+              <a:t>Larger optical centre</a:t>
             </a:r>
           </a:p>
         </p:txBody>
@@ -11428,7 +11524,7 @@
                 </a:solidFill>
                 <a:latin typeface="Calibri"/>
               </a:rPr>
-              <a:t>Light is totally reflected</a:t>
+              <a:t>Weaker converging power</a:t>
             </a:r>
           </a:p>
         </p:txBody>
@@ -11554,7 +11650,7 @@
                 </a:solidFill>
                 <a:latin typeface="Calibri"/>
               </a:rPr>
-              <a:t>Rays parallel to the principal axis converge at the principal focus F after passing through a convex lens. Its distance from O is the focal length.</a:t>
+              <a:t>A more sharply curved lens bends light more strongly, bringing parallel rays to a focus closer to the lens. So the fatter lens X has a shorter focal length and greater power.</a:t>
             </a:r>
           </a:p>
         </p:txBody>
@@ -11738,7 +11834,7 @@
                 </a:solidFill>
                 <a:latin typeface="Calibri"/>
               </a:rPr>
-              <a:t>Q4 — Two Foci</a:t>
+              <a:t>Q4 — Place the Object</a:t>
             </a:r>
           </a:p>
         </p:txBody>
@@ -11825,7 +11921,7 @@
                 </a:solidFill>
                 <a:latin typeface="Calibri"/>
               </a:rPr>
-              <a:t>A convex lens has two principal foci because:</a:t>
+              <a:t>Where should an object be placed before a convex lens to get a real image larger than the object (as in a projector)?</a:t>
             </a:r>
           </a:p>
         </p:txBody>
@@ -11985,7 +12081,7 @@
                 </a:solidFill>
                 <a:latin typeface="Calibri"/>
               </a:rPr>
-              <a:t>It has two optical centres</a:t>
+              <a:t>Beyond 2F</a:t>
             </a:r>
           </a:p>
         </p:txBody>
@@ -12145,7 +12241,7 @@
                 </a:solidFill>
                 <a:latin typeface="Calibri"/>
               </a:rPr>
-              <a:t>Light can fall on either surface</a:t>
+              <a:t>At 2F</a:t>
             </a:r>
           </a:p>
         </p:txBody>
@@ -12305,7 +12401,7 @@
                 </a:solidFill>
                 <a:latin typeface="Calibri"/>
               </a:rPr>
-              <a:t>It is made of two prisms</a:t>
+              <a:t>Between F and 2F</a:t>
             </a:r>
           </a:p>
         </p:txBody>
@@ -12465,7 +12561,7 @@
                 </a:solidFill>
                 <a:latin typeface="Calibri"/>
               </a:rPr>
-              <a:t>It has two focal lengths</a:t>
+              <a:t>Within F</a:t>
             </a:r>
           </a:p>
         </p:txBody>
@@ -12649,7 +12745,7 @@
                 </a:solidFill>
                 <a:latin typeface="Calibri"/>
               </a:rPr>
-              <a:t>Q4 — Two Foci</a:t>
+              <a:t>Q4 — Place the Object</a:t>
             </a:r>
           </a:p>
         </p:txBody>
@@ -12736,7 +12832,7 @@
                 </a:solidFill>
                 <a:latin typeface="Calibri"/>
               </a:rPr>
-              <a:t>A convex lens has two principal foci because:</a:t>
+              <a:t>Where should an object be placed before a convex lens to get a real image larger than the object (as in a projector)?</a:t>
             </a:r>
           </a:p>
         </p:txBody>
@@ -12896,7 +12992,7 @@
                 </a:solidFill>
                 <a:latin typeface="Calibri"/>
               </a:rPr>
-              <a:t>It has two optical centres</a:t>
+              <a:t>Beyond 2F</a:t>
             </a:r>
           </a:p>
         </p:txBody>
@@ -12910,6 +13006,166 @@
         <p:spPr>
           <a:xfrm>
             <a:off x="6172200" y="3337560"/>
+            <a:ext cx="5349240" cy="868680"/>
+          </a:xfrm>
+          <a:prstGeom prst="roundRect">
+            <a:avLst>
+              <a:gd name="adj" fmla="val 12000"/>
+            </a:avLst>
+          </a:prstGeom>
+          <a:solidFill>
+            <a:srgbClr val="EAF1F4"/>
+          </a:solidFill>
+          <a:ln>
+            <a:noFill/>
+          </a:ln>
+          <a:effectLst/>
+        </p:spPr>
+        <p:style>
+          <a:lnRef idx="1">
+            <a:schemeClr val="accent1"/>
+          </a:lnRef>
+          <a:fillRef idx="3">
+            <a:schemeClr val="accent1"/>
+          </a:fillRef>
+          <a:effectRef idx="2">
+            <a:schemeClr val="accent1"/>
+          </a:effectRef>
+          <a:fontRef idx="minor">
+            <a:schemeClr val="lt1"/>
+          </a:fontRef>
+        </p:style>
+        <p:txBody>
+          <a:bodyPr rtlCol="0" anchor="ctr"/>
+          <a:lstStyle/>
+          <a:p>
+            <a:pPr algn="ctr"/>
+          </a:p>
+        </p:txBody>
+      </p:sp>
+      <p:sp>
+        <p:nvSpPr>
+          <p:cNvPr id="13" name="Oval 12"/>
+          <p:cNvSpPr/>
+          <p:nvPr/>
+        </p:nvSpPr>
+        <p:spPr>
+          <a:xfrm>
+            <a:off x="6446520" y="3566160"/>
+            <a:ext cx="411480" cy="411480"/>
+          </a:xfrm>
+          <a:prstGeom prst="ellipse">
+            <a:avLst/>
+          </a:prstGeom>
+          <a:solidFill>
+            <a:srgbClr val="B7C2CC"/>
+          </a:solidFill>
+          <a:ln>
+            <a:noFill/>
+          </a:ln>
+          <a:effectLst/>
+        </p:spPr>
+        <p:style>
+          <a:lnRef idx="1">
+            <a:schemeClr val="accent1"/>
+          </a:lnRef>
+          <a:fillRef idx="3">
+            <a:schemeClr val="accent1"/>
+          </a:fillRef>
+          <a:effectRef idx="2">
+            <a:schemeClr val="accent1"/>
+          </a:effectRef>
+          <a:fontRef idx="minor">
+            <a:schemeClr val="lt1"/>
+          </a:fontRef>
+        </p:style>
+        <p:txBody>
+          <a:bodyPr rtlCol="0" anchor="ctr"/>
+          <a:lstStyle/>
+          <a:p>
+            <a:pPr algn="ctr"/>
+          </a:p>
+        </p:txBody>
+      </p:sp>
+      <p:sp>
+        <p:nvSpPr>
+          <p:cNvPr id="14" name="TextBox 13"/>
+          <p:cNvSpPr txBox="1"/>
+          <p:nvPr/>
+        </p:nvSpPr>
+        <p:spPr>
+          <a:xfrm>
+            <a:off x="6446520" y="3566160"/>
+            <a:ext cx="411480" cy="411480"/>
+          </a:xfrm>
+          <a:prstGeom prst="rect">
+            <a:avLst/>
+          </a:prstGeom>
+          <a:noFill/>
+        </p:spPr>
+        <p:txBody>
+          <a:bodyPr wrap="square" anchor="ctr" lIns="0" rIns="0" tIns="0" bIns="0">
+            <a:spAutoFit/>
+          </a:bodyPr>
+          <a:lstStyle/>
+          <a:p>
+            <a:pPr algn="ctr"/>
+            <a:r>
+              <a:rPr sz="1400" b="1" i="0">
+                <a:solidFill>
+                  <a:srgbClr val="FFFFFF"/>
+                </a:solidFill>
+                <a:latin typeface="Calibri"/>
+              </a:rPr>
+              <a:t>B</a:t>
+            </a:r>
+          </a:p>
+        </p:txBody>
+      </p:sp>
+      <p:sp>
+        <p:nvSpPr>
+          <p:cNvPr id="15" name="TextBox 14"/>
+          <p:cNvSpPr txBox="1"/>
+          <p:nvPr/>
+        </p:nvSpPr>
+        <p:spPr>
+          <a:xfrm>
+            <a:off x="7040880" y="3337560"/>
+            <a:ext cx="4297680" cy="868680"/>
+          </a:xfrm>
+          <a:prstGeom prst="rect">
+            <a:avLst/>
+          </a:prstGeom>
+          <a:noFill/>
+        </p:spPr>
+        <p:txBody>
+          <a:bodyPr wrap="square" anchor="ctr" lIns="0" rIns="0" tIns="0" bIns="0">
+            <a:spAutoFit/>
+          </a:bodyPr>
+          <a:lstStyle/>
+          <a:p>
+            <a:pPr algn="l"/>
+            <a:r>
+              <a:rPr sz="1450" b="0" i="0">
+                <a:solidFill>
+                  <a:srgbClr val="6B7280"/>
+                </a:solidFill>
+                <a:latin typeface="Calibri"/>
+              </a:rPr>
+              <a:t>At 2F</a:t>
+            </a:r>
+          </a:p>
+        </p:txBody>
+      </p:sp>
+      <p:sp>
+        <p:nvSpPr>
+          <p:cNvPr id="16" name="Rounded Rectangle 15"/>
+          <p:cNvSpPr/>
+          <p:nvPr/>
+        </p:nvSpPr>
+        <p:spPr>
+          <a:xfrm>
+            <a:off x="640080" y="4370831"/>
             <a:ext cx="5349240" cy="868680"/>
           </a:xfrm>
           <a:prstGeom prst="roundRect">
@@ -12951,13 +13207,13 @@
       </p:sp>
       <p:sp>
         <p:nvSpPr>
-          <p:cNvPr id="13" name="Oval 12"/>
+          <p:cNvPr id="17" name="Oval 16"/>
           <p:cNvSpPr/>
           <p:nvPr/>
         </p:nvSpPr>
         <p:spPr>
           <a:xfrm>
-            <a:off x="6446520" y="3566160"/>
+            <a:off x="914400" y="4599431"/>
             <a:ext cx="411480" cy="411480"/>
           </a:xfrm>
           <a:prstGeom prst="ellipse">
@@ -12995,13 +13251,13 @@
       </p:sp>
       <p:sp>
         <p:nvSpPr>
-          <p:cNvPr id="14" name="TextBox 13"/>
+          <p:cNvPr id="18" name="TextBox 17"/>
           <p:cNvSpPr txBox="1"/>
           <p:nvPr/>
         </p:nvSpPr>
         <p:spPr>
           <a:xfrm>
-            <a:off x="6446520" y="3566160"/>
+            <a:off x="914400" y="4599431"/>
             <a:ext cx="411480" cy="411480"/>
           </a:xfrm>
           <a:prstGeom prst="rect">
@@ -13030,13 +13286,13 @@
       </p:sp>
       <p:sp>
         <p:nvSpPr>
-          <p:cNvPr id="15" name="TextBox 14"/>
+          <p:cNvPr id="19" name="TextBox 18"/>
           <p:cNvSpPr txBox="1"/>
           <p:nvPr/>
         </p:nvSpPr>
         <p:spPr>
           <a:xfrm>
-            <a:off x="7040880" y="3337560"/>
+            <a:off x="1508760" y="4370831"/>
             <a:ext cx="4297680" cy="868680"/>
           </a:xfrm>
           <a:prstGeom prst="rect">
@@ -13058,20 +13314,20 @@
                 </a:solidFill>
                 <a:latin typeface="Calibri"/>
               </a:rPr>
-              <a:t>Light can fall on either surface</a:t>
-            </a:r>
-          </a:p>
-        </p:txBody>
-      </p:sp>
-      <p:sp>
-        <p:nvSpPr>
-          <p:cNvPr id="16" name="Rounded Rectangle 15"/>
+              <a:t>Between F and 2F</a:t>
+            </a:r>
+          </a:p>
+        </p:txBody>
+      </p:sp>
+      <p:sp>
+        <p:nvSpPr>
+          <p:cNvPr id="20" name="Rounded Rectangle 19"/>
           <p:cNvSpPr/>
           <p:nvPr/>
         </p:nvSpPr>
         <p:spPr>
           <a:xfrm>
-            <a:off x="640080" y="4370831"/>
+            <a:off x="6172200" y="4370831"/>
             <a:ext cx="5349240" cy="868680"/>
           </a:xfrm>
           <a:prstGeom prst="roundRect">
@@ -13111,13 +13367,13 @@
       </p:sp>
       <p:sp>
         <p:nvSpPr>
-          <p:cNvPr id="17" name="Oval 16"/>
+          <p:cNvPr id="21" name="Oval 20"/>
           <p:cNvSpPr/>
           <p:nvPr/>
         </p:nvSpPr>
         <p:spPr>
           <a:xfrm>
-            <a:off x="914400" y="4599431"/>
+            <a:off x="6446520" y="4599431"/>
             <a:ext cx="411480" cy="411480"/>
           </a:xfrm>
           <a:prstGeom prst="ellipse">
@@ -13155,13 +13411,13 @@
       </p:sp>
       <p:sp>
         <p:nvSpPr>
-          <p:cNvPr id="18" name="TextBox 17"/>
+          <p:cNvPr id="22" name="TextBox 21"/>
           <p:cNvSpPr txBox="1"/>
           <p:nvPr/>
         </p:nvSpPr>
         <p:spPr>
           <a:xfrm>
-            <a:off x="914400" y="4599431"/>
+            <a:off x="6446520" y="4599431"/>
             <a:ext cx="411480" cy="411480"/>
           </a:xfrm>
           <a:prstGeom prst="rect">
@@ -13183,20 +13439,20 @@
                 </a:solidFill>
                 <a:latin typeface="Calibri"/>
               </a:rPr>
-              <a:t>C</a:t>
-            </a:r>
-          </a:p>
-        </p:txBody>
-      </p:sp>
-      <p:sp>
-        <p:nvSpPr>
-          <p:cNvPr id="19" name="TextBox 18"/>
+              <a:t>D</a:t>
+            </a:r>
+          </a:p>
+        </p:txBody>
+      </p:sp>
+      <p:sp>
+        <p:nvSpPr>
+          <p:cNvPr id="23" name="TextBox 22"/>
           <p:cNvSpPr txBox="1"/>
           <p:nvPr/>
         </p:nvSpPr>
         <p:spPr>
           <a:xfrm>
-            <a:off x="1508760" y="4370831"/>
+            <a:off x="7040880" y="4370831"/>
             <a:ext cx="4297680" cy="868680"/>
           </a:xfrm>
           <a:prstGeom prst="rect">
@@ -13218,167 +13474,7 @@
                 </a:solidFill>
                 <a:latin typeface="Calibri"/>
               </a:rPr>
-              <a:t>It is made of two prisms</a:t>
-            </a:r>
-          </a:p>
-        </p:txBody>
-      </p:sp>
-      <p:sp>
-        <p:nvSpPr>
-          <p:cNvPr id="20" name="Rounded Rectangle 19"/>
-          <p:cNvSpPr/>
-          <p:nvPr/>
-        </p:nvSpPr>
-        <p:spPr>
-          <a:xfrm>
-            <a:off x="6172200" y="4370831"/>
-            <a:ext cx="5349240" cy="868680"/>
-          </a:xfrm>
-          <a:prstGeom prst="roundRect">
-            <a:avLst>
-              <a:gd name="adj" fmla="val 12000"/>
-            </a:avLst>
-          </a:prstGeom>
-          <a:solidFill>
-            <a:srgbClr val="EAF1F4"/>
-          </a:solidFill>
-          <a:ln>
-            <a:noFill/>
-          </a:ln>
-          <a:effectLst/>
-        </p:spPr>
-        <p:style>
-          <a:lnRef idx="1">
-            <a:schemeClr val="accent1"/>
-          </a:lnRef>
-          <a:fillRef idx="3">
-            <a:schemeClr val="accent1"/>
-          </a:fillRef>
-          <a:effectRef idx="2">
-            <a:schemeClr val="accent1"/>
-          </a:effectRef>
-          <a:fontRef idx="minor">
-            <a:schemeClr val="lt1"/>
-          </a:fontRef>
-        </p:style>
-        <p:txBody>
-          <a:bodyPr rtlCol="0" anchor="ctr"/>
-          <a:lstStyle/>
-          <a:p>
-            <a:pPr algn="ctr"/>
-          </a:p>
-        </p:txBody>
-      </p:sp>
-      <p:sp>
-        <p:nvSpPr>
-          <p:cNvPr id="21" name="Oval 20"/>
-          <p:cNvSpPr/>
-          <p:nvPr/>
-        </p:nvSpPr>
-        <p:spPr>
-          <a:xfrm>
-            <a:off x="6446520" y="4599431"/>
-            <a:ext cx="411480" cy="411480"/>
-          </a:xfrm>
-          <a:prstGeom prst="ellipse">
-            <a:avLst/>
-          </a:prstGeom>
-          <a:solidFill>
-            <a:srgbClr val="B7C2CC"/>
-          </a:solidFill>
-          <a:ln>
-            <a:noFill/>
-          </a:ln>
-          <a:effectLst/>
-        </p:spPr>
-        <p:style>
-          <a:lnRef idx="1">
-            <a:schemeClr val="accent1"/>
-          </a:lnRef>
-          <a:fillRef idx="3">
-            <a:schemeClr val="accent1"/>
-          </a:fillRef>
-          <a:effectRef idx="2">
-            <a:schemeClr val="accent1"/>
-          </a:effectRef>
-          <a:fontRef idx="minor">
-            <a:schemeClr val="lt1"/>
-          </a:fontRef>
-        </p:style>
-        <p:txBody>
-          <a:bodyPr rtlCol="0" anchor="ctr"/>
-          <a:lstStyle/>
-          <a:p>
-            <a:pPr algn="ctr"/>
-          </a:p>
-        </p:txBody>
-      </p:sp>
-      <p:sp>
-        <p:nvSpPr>
-          <p:cNvPr id="22" name="TextBox 21"/>
-          <p:cNvSpPr txBox="1"/>
-          <p:nvPr/>
-        </p:nvSpPr>
-        <p:spPr>
-          <a:xfrm>
-            <a:off x="6446520" y="4599431"/>
-            <a:ext cx="411480" cy="411480"/>
-          </a:xfrm>
-          <a:prstGeom prst="rect">
-            <a:avLst/>
-          </a:prstGeom>
-          <a:noFill/>
-        </p:spPr>
-        <p:txBody>
-          <a:bodyPr wrap="square" anchor="ctr" lIns="0" rIns="0" tIns="0" bIns="0">
-            <a:spAutoFit/>
-          </a:bodyPr>
-          <a:lstStyle/>
-          <a:p>
-            <a:pPr algn="ctr"/>
-            <a:r>
-              <a:rPr sz="1400" b="1" i="0">
-                <a:solidFill>
-                  <a:srgbClr val="FFFFFF"/>
-                </a:solidFill>
-                <a:latin typeface="Calibri"/>
-              </a:rPr>
-              <a:t>D</a:t>
-            </a:r>
-          </a:p>
-        </p:txBody>
-      </p:sp>
-      <p:sp>
-        <p:nvSpPr>
-          <p:cNvPr id="23" name="TextBox 22"/>
-          <p:cNvSpPr txBox="1"/>
-          <p:nvPr/>
-        </p:nvSpPr>
-        <p:spPr>
-          <a:xfrm>
-            <a:off x="7040880" y="4370831"/>
-            <a:ext cx="4297680" cy="868680"/>
-          </a:xfrm>
-          <a:prstGeom prst="rect">
-            <a:avLst/>
-          </a:prstGeom>
-          <a:noFill/>
-        </p:spPr>
-        <p:txBody>
-          <a:bodyPr wrap="square" anchor="ctr" lIns="0" rIns="0" tIns="0" bIns="0">
-            <a:spAutoFit/>
-          </a:bodyPr>
-          <a:lstStyle/>
-          <a:p>
-            <a:pPr algn="l"/>
-            <a:r>
-              <a:rPr sz="1450" b="0" i="0">
-                <a:solidFill>
-                  <a:srgbClr val="6B7280"/>
-                </a:solidFill>
-                <a:latin typeface="Calibri"/>
-              </a:rPr>
-              <a:t>It has two focal lengths</a:t>
+              <a:t>Within F</a:t>
             </a:r>
           </a:p>
         </p:txBody>
@@ -13504,7 +13600,7 @@
                 </a:solidFill>
                 <a:latin typeface="Calibri"/>
               </a:rPr>
-              <a:t>Light can enter from either side, so there is a focus on each side of the lens, both at the same distance f from the optical centre.</a:t>
+              <a:t>With the object between F and 2F, the image forms beyond 2F and is real, inverted and magnified — exactly how a projector throws an enlarged picture on the screen.</a:t>
             </a:r>
           </a:p>
         </p:txBody>
@@ -17092,9 +17188,33 @@
           </a:p>
         </p:txBody>
       </p:sp>
-      <p:sp>
-        <p:nvSpPr>
-          <p:cNvPr id="8" name="TextBox 7"/>
+      <p:pic>
+        <p:nvPicPr>
+          <p:cNvPr id="8" name="Picture 7" descr="spark_FFFFFF.png"/>
+          <p:cNvPicPr>
+            <a:picLocks noChangeAspect="1"/>
+          </p:cNvPicPr>
+          <p:nvPr/>
+        </p:nvPicPr>
+        <p:blipFill>
+          <a:blip r:embed="rId2"/>
+          <a:stretch>
+            <a:fillRect/>
+          </a:stretch>
+        </p:blipFill>
+        <p:spPr>
+          <a:xfrm>
+            <a:off x="1070762" y="2323490"/>
+            <a:ext cx="281635" cy="281635"/>
+          </a:xfrm>
+          <a:prstGeom prst="rect">
+            <a:avLst/>
+          </a:prstGeom>
+        </p:spPr>
+      </p:pic>
+      <p:sp>
+        <p:nvSpPr>
+          <p:cNvPr id="9" name="TextBox 8"/>
           <p:cNvSpPr txBox="1"/>
           <p:nvPr/>
         </p:nvSpPr>
@@ -17129,7 +17249,7 @@
       </p:sp>
       <p:sp>
         <p:nvSpPr>
-          <p:cNvPr id="9" name="TextBox 8"/>
+          <p:cNvPr id="10" name="TextBox 9"/>
           <p:cNvSpPr txBox="1"/>
           <p:nvPr/>
         </p:nvSpPr>
@@ -17164,7 +17284,7 @@
       </p:sp>
       <p:sp>
         <p:nvSpPr>
-          <p:cNvPr id="10" name="Rounded Rectangle 9"/>
+          <p:cNvPr id="11" name="Rounded Rectangle 10"/>
           <p:cNvSpPr/>
           <p:nvPr/>
         </p:nvSpPr>
@@ -17216,7 +17336,7 @@
       </p:sp>
       <p:sp>
         <p:nvSpPr>
-          <p:cNvPr id="11" name="Rounded Rectangle 10"/>
+          <p:cNvPr id="12" name="Rounded Rectangle 11"/>
           <p:cNvSpPr/>
           <p:nvPr/>
         </p:nvSpPr>
@@ -17260,9 +17380,33 @@
           </a:p>
         </p:txBody>
       </p:sp>
-      <p:sp>
-        <p:nvSpPr>
-          <p:cNvPr id="12" name="TextBox 11"/>
+      <p:pic>
+        <p:nvPicPr>
+          <p:cNvPr id="13" name="Picture 12" descr="spark_FFFFFF.png"/>
+          <p:cNvPicPr>
+            <a:picLocks noChangeAspect="1"/>
+          </p:cNvPicPr>
+          <p:nvPr/>
+        </p:nvPicPr>
+        <p:blipFill>
+          <a:blip r:embed="rId2"/>
+          <a:stretch>
+            <a:fillRect/>
+          </a:stretch>
+        </p:blipFill>
+        <p:spPr>
+          <a:xfrm>
+            <a:off x="6648602" y="2323490"/>
+            <a:ext cx="281635" cy="281635"/>
+          </a:xfrm>
+          <a:prstGeom prst="rect">
+            <a:avLst/>
+          </a:prstGeom>
+        </p:spPr>
+      </p:pic>
+      <p:sp>
+        <p:nvSpPr>
+          <p:cNvPr id="14" name="TextBox 13"/>
           <p:cNvSpPr txBox="1"/>
           <p:nvPr/>
         </p:nvSpPr>
@@ -17297,7 +17441,7 @@
       </p:sp>
       <p:sp>
         <p:nvSpPr>
-          <p:cNvPr id="13" name="TextBox 12"/>
+          <p:cNvPr id="15" name="TextBox 14"/>
           <p:cNvSpPr txBox="1"/>
           <p:nvPr/>
         </p:nvSpPr>
@@ -17332,7 +17476,7 @@
       </p:sp>
       <p:sp>
         <p:nvSpPr>
-          <p:cNvPr id="14" name="Rounded Rectangle 13"/>
+          <p:cNvPr id="16" name="Rounded Rectangle 15"/>
           <p:cNvSpPr/>
           <p:nvPr/>
         </p:nvSpPr>
@@ -17384,7 +17528,7 @@
       </p:sp>
       <p:sp>
         <p:nvSpPr>
-          <p:cNvPr id="15" name="Rounded Rectangle 14"/>
+          <p:cNvPr id="17" name="Rounded Rectangle 16"/>
           <p:cNvSpPr/>
           <p:nvPr/>
         </p:nvSpPr>
@@ -17428,9 +17572,33 @@
           </a:p>
         </p:txBody>
       </p:sp>
-      <p:sp>
-        <p:nvSpPr>
-          <p:cNvPr id="16" name="TextBox 15"/>
+      <p:pic>
+        <p:nvPicPr>
+          <p:cNvPr id="18" name="Picture 17" descr="lens_FFFFFF.png"/>
+          <p:cNvPicPr>
+            <a:picLocks noChangeAspect="1"/>
+          </p:cNvPicPr>
+          <p:nvPr/>
+        </p:nvPicPr>
+        <p:blipFill>
+          <a:blip r:embed="rId3"/>
+          <a:stretch>
+            <a:fillRect/>
+          </a:stretch>
+        </p:blipFill>
+        <p:spPr>
+          <a:xfrm>
+            <a:off x="1070762" y="4152290"/>
+            <a:ext cx="281635" cy="281635"/>
+          </a:xfrm>
+          <a:prstGeom prst="rect">
+            <a:avLst/>
+          </a:prstGeom>
+        </p:spPr>
+      </p:pic>
+      <p:sp>
+        <p:nvSpPr>
+          <p:cNvPr id="19" name="TextBox 18"/>
           <p:cNvSpPr txBox="1"/>
           <p:nvPr/>
         </p:nvSpPr>
@@ -17465,7 +17633,7 @@
       </p:sp>
       <p:sp>
         <p:nvSpPr>
-          <p:cNvPr id="17" name="TextBox 16"/>
+          <p:cNvPr id="20" name="TextBox 19"/>
           <p:cNvSpPr txBox="1"/>
           <p:nvPr/>
         </p:nvSpPr>
@@ -17500,7 +17668,7 @@
       </p:sp>
       <p:sp>
         <p:nvSpPr>
-          <p:cNvPr id="18" name="Rounded Rectangle 17"/>
+          <p:cNvPr id="21" name="Rounded Rectangle 20"/>
           <p:cNvSpPr/>
           <p:nvPr/>
         </p:nvSpPr>
@@ -17552,7 +17720,7 @@
       </p:sp>
       <p:sp>
         <p:nvSpPr>
-          <p:cNvPr id="19" name="Rounded Rectangle 18"/>
+          <p:cNvPr id="22" name="Rounded Rectangle 21"/>
           <p:cNvSpPr/>
           <p:nvPr/>
         </p:nvSpPr>
@@ -17596,9 +17764,33 @@
           </a:p>
         </p:txBody>
       </p:sp>
-      <p:sp>
-        <p:nvSpPr>
-          <p:cNvPr id="20" name="TextBox 19"/>
+      <p:pic>
+        <p:nvPicPr>
+          <p:cNvPr id="23" name="Picture 22" descr="eye_FFFFFF.png"/>
+          <p:cNvPicPr>
+            <a:picLocks noChangeAspect="1"/>
+          </p:cNvPicPr>
+          <p:nvPr/>
+        </p:nvPicPr>
+        <p:blipFill>
+          <a:blip r:embed="rId4"/>
+          <a:stretch>
+            <a:fillRect/>
+          </a:stretch>
+        </p:blipFill>
+        <p:spPr>
+          <a:xfrm>
+            <a:off x="6648602" y="4152290"/>
+            <a:ext cx="281635" cy="281635"/>
+          </a:xfrm>
+          <a:prstGeom prst="rect">
+            <a:avLst/>
+          </a:prstGeom>
+        </p:spPr>
+      </p:pic>
+      <p:sp>
+        <p:nvSpPr>
+          <p:cNvPr id="24" name="TextBox 23"/>
           <p:cNvSpPr txBox="1"/>
           <p:nvPr/>
         </p:nvSpPr>
@@ -17633,7 +17825,7 @@
       </p:sp>
       <p:sp>
         <p:nvSpPr>
-          <p:cNvPr id="21" name="TextBox 20"/>
+          <p:cNvPr id="25" name="TextBox 24"/>
           <p:cNvSpPr txBox="1"/>
           <p:nvPr/>
         </p:nvSpPr>
@@ -26798,9 +26990,33 @@
           </a:p>
         </p:txBody>
       </p:sp>
-      <p:sp>
-        <p:nvSpPr>
-          <p:cNvPr id="8" name="TextBox 7"/>
+      <p:pic>
+        <p:nvPicPr>
+          <p:cNvPr id="8" name="Picture 7" descr="lens_FFFFFF.png"/>
+          <p:cNvPicPr>
+            <a:picLocks noChangeAspect="1"/>
+          </p:cNvPicPr>
+          <p:nvPr/>
+        </p:nvPicPr>
+        <p:blipFill>
+          <a:blip r:embed="rId2"/>
+          <a:stretch>
+            <a:fillRect/>
+          </a:stretch>
+        </p:blipFill>
+        <p:spPr>
+          <a:xfrm>
+            <a:off x="1070762" y="2323490"/>
+            <a:ext cx="281635" cy="281635"/>
+          </a:xfrm>
+          <a:prstGeom prst="rect">
+            <a:avLst/>
+          </a:prstGeom>
+        </p:spPr>
+      </p:pic>
+      <p:sp>
+        <p:nvSpPr>
+          <p:cNvPr id="9" name="TextBox 8"/>
           <p:cNvSpPr txBox="1"/>
           <p:nvPr/>
         </p:nvSpPr>
@@ -26835,7 +27051,7 @@
       </p:sp>
       <p:sp>
         <p:nvSpPr>
-          <p:cNvPr id="9" name="TextBox 8"/>
+          <p:cNvPr id="10" name="TextBox 9"/>
           <p:cNvSpPr txBox="1"/>
           <p:nvPr/>
         </p:nvSpPr>
@@ -26870,7 +27086,7 @@
       </p:sp>
       <p:sp>
         <p:nvSpPr>
-          <p:cNvPr id="10" name="Rounded Rectangle 9"/>
+          <p:cNvPr id="11" name="Rounded Rectangle 10"/>
           <p:cNvSpPr/>
           <p:nvPr/>
         </p:nvSpPr>
@@ -26922,7 +27138,7 @@
       </p:sp>
       <p:sp>
         <p:nvSpPr>
-          <p:cNvPr id="11" name="Rounded Rectangle 10"/>
+          <p:cNvPr id="12" name="Rounded Rectangle 11"/>
           <p:cNvSpPr/>
           <p:nvPr/>
         </p:nvSpPr>
@@ -26966,9 +27182,33 @@
           </a:p>
         </p:txBody>
       </p:sp>
-      <p:sp>
-        <p:nvSpPr>
-          <p:cNvPr id="12" name="TextBox 11"/>
+      <p:pic>
+        <p:nvPicPr>
+          <p:cNvPr id="13" name="Picture 12" descr="lens_FFFFFF.png"/>
+          <p:cNvPicPr>
+            <a:picLocks noChangeAspect="1"/>
+          </p:cNvPicPr>
+          <p:nvPr/>
+        </p:nvPicPr>
+        <p:blipFill>
+          <a:blip r:embed="rId2"/>
+          <a:stretch>
+            <a:fillRect/>
+          </a:stretch>
+        </p:blipFill>
+        <p:spPr>
+          <a:xfrm>
+            <a:off x="6648602" y="2323490"/>
+            <a:ext cx="281635" cy="281635"/>
+          </a:xfrm>
+          <a:prstGeom prst="rect">
+            <a:avLst/>
+          </a:prstGeom>
+        </p:spPr>
+      </p:pic>
+      <p:sp>
+        <p:nvSpPr>
+          <p:cNvPr id="14" name="TextBox 13"/>
           <p:cNvSpPr txBox="1"/>
           <p:nvPr/>
         </p:nvSpPr>
@@ -27003,7 +27243,7 @@
       </p:sp>
       <p:sp>
         <p:nvSpPr>
-          <p:cNvPr id="13" name="TextBox 12"/>
+          <p:cNvPr id="15" name="TextBox 14"/>
           <p:cNvSpPr txBox="1"/>
           <p:nvPr/>
         </p:nvSpPr>
@@ -27038,7 +27278,7 @@
       </p:sp>
       <p:sp>
         <p:nvSpPr>
-          <p:cNvPr id="14" name="Rounded Rectangle 13"/>
+          <p:cNvPr id="16" name="Rounded Rectangle 15"/>
           <p:cNvSpPr/>
           <p:nvPr/>
         </p:nvSpPr>
@@ -27090,7 +27330,7 @@
       </p:sp>
       <p:sp>
         <p:nvSpPr>
-          <p:cNvPr id="15" name="Rounded Rectangle 14"/>
+          <p:cNvPr id="17" name="Rounded Rectangle 16"/>
           <p:cNvSpPr/>
           <p:nvPr/>
         </p:nvSpPr>
@@ -27134,9 +27374,33 @@
           </a:p>
         </p:txBody>
       </p:sp>
-      <p:sp>
-        <p:nvSpPr>
-          <p:cNvPr id="16" name="TextBox 15"/>
+      <p:pic>
+        <p:nvPicPr>
+          <p:cNvPr id="18" name="Picture 17" descr="spark_FFFFFF.png"/>
+          <p:cNvPicPr>
+            <a:picLocks noChangeAspect="1"/>
+          </p:cNvPicPr>
+          <p:nvPr/>
+        </p:nvPicPr>
+        <p:blipFill>
+          <a:blip r:embed="rId3"/>
+          <a:stretch>
+            <a:fillRect/>
+          </a:stretch>
+        </p:blipFill>
+        <p:spPr>
+          <a:xfrm>
+            <a:off x="1070762" y="4152290"/>
+            <a:ext cx="281635" cy="281635"/>
+          </a:xfrm>
+          <a:prstGeom prst="rect">
+            <a:avLst/>
+          </a:prstGeom>
+        </p:spPr>
+      </p:pic>
+      <p:sp>
+        <p:nvSpPr>
+          <p:cNvPr id="19" name="TextBox 18"/>
           <p:cNvSpPr txBox="1"/>
           <p:nvPr/>
         </p:nvSpPr>
@@ -27171,7 +27435,7 @@
       </p:sp>
       <p:sp>
         <p:nvSpPr>
-          <p:cNvPr id="17" name="TextBox 16"/>
+          <p:cNvPr id="20" name="TextBox 19"/>
           <p:cNvSpPr txBox="1"/>
           <p:nvPr/>
         </p:nvSpPr>
@@ -27206,7 +27470,7 @@
       </p:sp>
       <p:sp>
         <p:nvSpPr>
-          <p:cNvPr id="18" name="Rounded Rectangle 17"/>
+          <p:cNvPr id="21" name="Rounded Rectangle 20"/>
           <p:cNvSpPr/>
           <p:nvPr/>
         </p:nvSpPr>
@@ -27258,7 +27522,7 @@
       </p:sp>
       <p:sp>
         <p:nvSpPr>
-          <p:cNvPr id="19" name="Rounded Rectangle 18"/>
+          <p:cNvPr id="22" name="Rounded Rectangle 21"/>
           <p:cNvSpPr/>
           <p:nvPr/>
         </p:nvSpPr>
@@ -27302,9 +27566,33 @@
           </a:p>
         </p:txBody>
       </p:sp>
-      <p:sp>
-        <p:nvSpPr>
-          <p:cNvPr id="20" name="TextBox 19"/>
+      <p:pic>
+        <p:nvPicPr>
+          <p:cNvPr id="23" name="Picture 22" descr="ray_FFFFFF.png"/>
+          <p:cNvPicPr>
+            <a:picLocks noChangeAspect="1"/>
+          </p:cNvPicPr>
+          <p:nvPr/>
+        </p:nvPicPr>
+        <p:blipFill>
+          <a:blip r:embed="rId4"/>
+          <a:stretch>
+            <a:fillRect/>
+          </a:stretch>
+        </p:blipFill>
+        <p:spPr>
+          <a:xfrm>
+            <a:off x="6648602" y="4152290"/>
+            <a:ext cx="281635" cy="281635"/>
+          </a:xfrm>
+          <a:prstGeom prst="rect">
+            <a:avLst/>
+          </a:prstGeom>
+        </p:spPr>
+      </p:pic>
+      <p:sp>
+        <p:nvSpPr>
+          <p:cNvPr id="24" name="TextBox 23"/>
           <p:cNvSpPr txBox="1"/>
           <p:nvPr/>
         </p:nvSpPr>
@@ -27339,7 +27627,7 @@
       </p:sp>
       <p:sp>
         <p:nvSpPr>
-          <p:cNvPr id="21" name="TextBox 20"/>
+          <p:cNvPr id="25" name="TextBox 24"/>
           <p:cNvSpPr txBox="1"/>
           <p:nvPr/>
         </p:nvSpPr>
@@ -29329,9 +29617,33 @@
           </a:p>
         </p:txBody>
       </p:sp>
-      <p:sp>
-        <p:nvSpPr>
-          <p:cNvPr id="8" name="TextBox 7"/>
+      <p:pic>
+        <p:nvPicPr>
+          <p:cNvPr id="8" name="Picture 7" descr="ray_FFFFFF.png"/>
+          <p:cNvPicPr>
+            <a:picLocks noChangeAspect="1"/>
+          </p:cNvPicPr>
+          <p:nvPr/>
+        </p:nvPicPr>
+        <p:blipFill>
+          <a:blip r:embed="rId2"/>
+          <a:stretch>
+            <a:fillRect/>
+          </a:stretch>
+        </p:blipFill>
+        <p:spPr>
+          <a:xfrm>
+            <a:off x="1070762" y="2323490"/>
+            <a:ext cx="281635" cy="281635"/>
+          </a:xfrm>
+          <a:prstGeom prst="rect">
+            <a:avLst/>
+          </a:prstGeom>
+        </p:spPr>
+      </p:pic>
+      <p:sp>
+        <p:nvSpPr>
+          <p:cNvPr id="9" name="TextBox 8"/>
           <p:cNvSpPr txBox="1"/>
           <p:nvPr/>
         </p:nvSpPr>
@@ -29366,7 +29678,7 @@
       </p:sp>
       <p:sp>
         <p:nvSpPr>
-          <p:cNvPr id="9" name="TextBox 8"/>
+          <p:cNvPr id="10" name="TextBox 9"/>
           <p:cNvSpPr txBox="1"/>
           <p:nvPr/>
         </p:nvSpPr>
@@ -29401,7 +29713,7 @@
       </p:sp>
       <p:sp>
         <p:nvSpPr>
-          <p:cNvPr id="10" name="Rounded Rectangle 9"/>
+          <p:cNvPr id="11" name="Rounded Rectangle 10"/>
           <p:cNvSpPr/>
           <p:nvPr/>
         </p:nvSpPr>
@@ -29453,7 +29765,7 @@
       </p:sp>
       <p:sp>
         <p:nvSpPr>
-          <p:cNvPr id="11" name="Rounded Rectangle 10"/>
+          <p:cNvPr id="12" name="Rounded Rectangle 11"/>
           <p:cNvSpPr/>
           <p:nvPr/>
         </p:nvSpPr>
@@ -29497,9 +29809,33 @@
           </a:p>
         </p:txBody>
       </p:sp>
-      <p:sp>
-        <p:nvSpPr>
-          <p:cNvPr id="12" name="TextBox 11"/>
+      <p:pic>
+        <p:nvPicPr>
+          <p:cNvPr id="13" name="Picture 12" descr="ray_FFFFFF.png"/>
+          <p:cNvPicPr>
+            <a:picLocks noChangeAspect="1"/>
+          </p:cNvPicPr>
+          <p:nvPr/>
+        </p:nvPicPr>
+        <p:blipFill>
+          <a:blip r:embed="rId2"/>
+          <a:stretch>
+            <a:fillRect/>
+          </a:stretch>
+        </p:blipFill>
+        <p:spPr>
+          <a:xfrm>
+            <a:off x="6648602" y="2323490"/>
+            <a:ext cx="281635" cy="281635"/>
+          </a:xfrm>
+          <a:prstGeom prst="rect">
+            <a:avLst/>
+          </a:prstGeom>
+        </p:spPr>
+      </p:pic>
+      <p:sp>
+        <p:nvSpPr>
+          <p:cNvPr id="14" name="TextBox 13"/>
           <p:cNvSpPr txBox="1"/>
           <p:nvPr/>
         </p:nvSpPr>
@@ -29534,7 +29870,7 @@
       </p:sp>
       <p:sp>
         <p:nvSpPr>
-          <p:cNvPr id="13" name="TextBox 12"/>
+          <p:cNvPr id="15" name="TextBox 14"/>
           <p:cNvSpPr txBox="1"/>
           <p:nvPr/>
         </p:nvSpPr>
@@ -29569,7 +29905,7 @@
       </p:sp>
       <p:sp>
         <p:nvSpPr>
-          <p:cNvPr id="14" name="Rounded Rectangle 13"/>
+          <p:cNvPr id="16" name="Rounded Rectangle 15"/>
           <p:cNvSpPr/>
           <p:nvPr/>
         </p:nvSpPr>
@@ -29621,7 +29957,7 @@
       </p:sp>
       <p:sp>
         <p:nvSpPr>
-          <p:cNvPr id="15" name="Rounded Rectangle 14"/>
+          <p:cNvPr id="17" name="Rounded Rectangle 16"/>
           <p:cNvSpPr/>
           <p:nvPr/>
         </p:nvSpPr>
@@ -29665,9 +30001,33 @@
           </a:p>
         </p:txBody>
       </p:sp>
-      <p:sp>
-        <p:nvSpPr>
-          <p:cNvPr id="16" name="TextBox 15"/>
+      <p:pic>
+        <p:nvPicPr>
+          <p:cNvPr id="18" name="Picture 17" descr="ray_FFFFFF.png"/>
+          <p:cNvPicPr>
+            <a:picLocks noChangeAspect="1"/>
+          </p:cNvPicPr>
+          <p:nvPr/>
+        </p:nvPicPr>
+        <p:blipFill>
+          <a:blip r:embed="rId2"/>
+          <a:stretch>
+            <a:fillRect/>
+          </a:stretch>
+        </p:blipFill>
+        <p:spPr>
+          <a:xfrm>
+            <a:off x="1070762" y="4152290"/>
+            <a:ext cx="281635" cy="281635"/>
+          </a:xfrm>
+          <a:prstGeom prst="rect">
+            <a:avLst/>
+          </a:prstGeom>
+        </p:spPr>
+      </p:pic>
+      <p:sp>
+        <p:nvSpPr>
+          <p:cNvPr id="19" name="TextBox 18"/>
           <p:cNvSpPr txBox="1"/>
           <p:nvPr/>
         </p:nvSpPr>
@@ -29702,7 +30062,7 @@
       </p:sp>
       <p:sp>
         <p:nvSpPr>
-          <p:cNvPr id="17" name="TextBox 16"/>
+          <p:cNvPr id="20" name="TextBox 19"/>
           <p:cNvSpPr txBox="1"/>
           <p:nvPr/>
         </p:nvSpPr>
@@ -29737,7 +30097,7 @@
       </p:sp>
       <p:sp>
         <p:nvSpPr>
-          <p:cNvPr id="18" name="Rounded Rectangle 17"/>
+          <p:cNvPr id="21" name="Rounded Rectangle 20"/>
           <p:cNvSpPr/>
           <p:nvPr/>
         </p:nvSpPr>
@@ -29789,7 +30149,7 @@
       </p:sp>
       <p:sp>
         <p:nvSpPr>
-          <p:cNvPr id="19" name="Rounded Rectangle 18"/>
+          <p:cNvPr id="22" name="Rounded Rectangle 21"/>
           <p:cNvSpPr/>
           <p:nvPr/>
         </p:nvSpPr>
@@ -29833,9 +30193,33 @@
           </a:p>
         </p:txBody>
       </p:sp>
-      <p:sp>
-        <p:nvSpPr>
-          <p:cNvPr id="20" name="TextBox 19"/>
+      <p:pic>
+        <p:nvPicPr>
+          <p:cNvPr id="23" name="Picture 22" descr="spark_FFFFFF.png"/>
+          <p:cNvPicPr>
+            <a:picLocks noChangeAspect="1"/>
+          </p:cNvPicPr>
+          <p:nvPr/>
+        </p:nvPicPr>
+        <p:blipFill>
+          <a:blip r:embed="rId3"/>
+          <a:stretch>
+            <a:fillRect/>
+          </a:stretch>
+        </p:blipFill>
+        <p:spPr>
+          <a:xfrm>
+            <a:off x="6648602" y="4152290"/>
+            <a:ext cx="281635" cy="281635"/>
+          </a:xfrm>
+          <a:prstGeom prst="rect">
+            <a:avLst/>
+          </a:prstGeom>
+        </p:spPr>
+      </p:pic>
+      <p:sp>
+        <p:nvSpPr>
+          <p:cNvPr id="24" name="TextBox 23"/>
           <p:cNvSpPr txBox="1"/>
           <p:nvPr/>
         </p:nvSpPr>
@@ -29870,7 +30254,7 @@
       </p:sp>
       <p:sp>
         <p:nvSpPr>
-          <p:cNvPr id="21" name="TextBox 20"/>
+          <p:cNvPr id="25" name="TextBox 24"/>
           <p:cNvSpPr txBox="1"/>
           <p:nvPr/>
         </p:nvSpPr>
